--- a/site/docs/presentaciones/parts/parte-7-etica-fairness-privacidad-completa.pptx
+++ b/site/docs/presentaciones/parts/parte-7-etica-fairness-privacidad-completa.pptx
@@ -3942,7 +3942,7 @@
                 </a:solidFill>
                 <a:latin typeface="Segoe UI"/>
               </a:rPr>
-              <a:t>Dataset sintético binario con atributo protegido A∈{0,1} y base rates diferentes (necesario para activar el teorema de imposibilidad). Requiere: pip install numpy pandas scikit-learn matplotlib. fairlearn opcional — implementamos todo a mano.</a:t>
+              <a:t>No hay UNA definición de "justo". Demographic parity (misma tasa de aprobación por grupo), equalized odds (mismos TPR y FPR por grupo) y calibration (un score de 0.7 significa lo mismo en todos los grupos) son tres nociones razonables y, cuando las tasas</a:t>
             </a:r>
           </a:p>
         </p:txBody>
@@ -5404,7 +5404,7 @@
                 </a:solidFill>
                 <a:latin typeface="Segoe UI"/>
               </a:rPr>
-              <a:t>Parte: 7 — Ética, Fairness y Privacidad · Fuente: Dwork &amp; Roth, The Algorithmic Foundations of Differential Privacy (2014) caps. 2-3 + Dwork, McSherry, Nissim, Smith (TCC, 2006) Calibrating Noise to Sensitivity.  Duración estimada: 75 min.</a:t>
+              <a:t>Parte: 7 — Ética, Fairness y Privacidad · Fuente: Dwork &amp; Roth, The Algorithmic Foundations of Differential Privacy (2014) caps. 2-3 + Dwork, McSherry, Nissim, Smith (TCC, 2006) Calibrating Noise to Sensitivity.  Duración estimada: 75 min. · Nivel: Intermedio-Avanzado</a:t>
             </a:r>
           </a:p>
         </p:txBody>
@@ -6356,7 +6356,7 @@
                 </a:solidFill>
                 <a:latin typeface="Segoe UI"/>
               </a:rPr>
-              <a:t>Sintético: dataset de salarios n=10_000. Requiere: pip install numpy pandas scikit-learn.</a:t>
+              <a:t>Privacidad diferencial = añadir ruido calibrado a la salida de una consulta para que el resultado no dependa de ningún individuo concreto. Formalmente: si sacás a una persona del dataset, la distribución de la respuesta casi no cambia — la razón entre ambas</a:t>
             </a:r>
           </a:p>
         </p:txBody>
@@ -7571,7 +7571,7 @@
                 </a:solidFill>
                 <a:latin typeface="Segoe UI"/>
               </a:rPr>
-              <a:t>Parte: 7 — Ética, Fairness y Privacidad · Fuente: McMahan et al. Communication-Efficient Learning of Deep Networks from Decentralized Data (AISTATS 2017) + Kairouz et al. Advances and Open Problems in Federated Learning (FnTML 2021).  Duración estimada: 75 min.</a:t>
+              <a:t>Parte: 7 — Ética, Fairness y Privacidad · Fuente: McMahan et al. Communication-Efficient Learning of Deep Networks from Decentralized Data (AISTATS 2017) + Kairouz et al. Advances and Open Problems in Federated Learning (FnTML 2021).  Duración estimada: 75 min. · Nivel: Intermedio-Avanzado</a:t>
             </a:r>
           </a:p>
         </p:txBody>
@@ -10248,7 +10248,7 @@
                 </a:solidFill>
                 <a:latin typeface="Segoe UI"/>
               </a:rPr>
-              <a:t>Parte: 7 — Ética, Fairness y Privacidad · Fuente: Reglamento UE 2016/679 (GDPR) + Reglamento UE 2024/1689 (AI Act).  Duración estimada: 75 min.</a:t>
+              <a:t>Parte: 7 — Ética, Fairness y Privacidad · Fuente: Reglamento UE 2016/679 (GDPR) + Reglamento UE 2024/1689 (AI Act).  Duración estimada: 75 min. · Nivel: Intermedio-Avanzado</a:t>
             </a:r>
           </a:p>
         </p:txBody>
@@ -12662,7 +12662,7 @@
                 </a:solidFill>
                 <a:latin typeface="Segoe UI"/>
               </a:rPr>
-              <a:t>Parte: 7 — Ética, Fairness y Privacidad · Fuente: Pineau et al., Improving Reproducibility in ML Research (JMLR 2021) + Gebru et al., Datasheets for Datasets (CACM 2021) + Mitchell et al., Model Cards for Model Reporting (FAT* 2019).  Duración estimada: 75 min.</a:t>
+              <a:t>Parte: 7 — Ética, Fairness y Privacidad · Fuente: Pineau et al., Improving Reproducibility in ML Research (JMLR 2021) + Gebru et al., Datasheets for Datasets (CACM 2021) + Mitchell et al., Model Cards for Model Reporting (FAT* 2019).  Duración estimada: 75 min. · Nivel: Intermedio-Avanzado</a:t>
             </a:r>
           </a:p>
         </p:txBody>
@@ -15173,7 +15173,7 @@
                 </a:solidFill>
                 <a:latin typeface="Segoe UI"/>
               </a:rPr>
-              <a:t>Parte: 7 — Ética, Fairness y Privacidad · Fuente: Suresh &amp; Guttag, A Framework for Understanding Sources of Harm throughout the ML Life Cycle (EAAMO 2021) + Barocas, Hardt, Narayanan, Fairness and Machine Learning (2023), caps. 1-2.  Duración estimada: 75 min.</a:t>
+              <a:t>Parte: 7 — Ética, Fairness y Privacidad · Fuente: Suresh &amp; Guttag, A Framework for Understanding Sources of Harm throughout the ML Life Cycle (EAAMO 2021) + Barocas, Hardt, Narayanan, Fairness and Machine Learning (2023), caps. 1-2.  Duración estimada: 75 min. · Nivel: Intermedio-Avanzado</a:t>
             </a:r>
           </a:p>
         </p:txBody>
@@ -17587,7 +17587,7 @@
                 </a:solidFill>
                 <a:latin typeface="Segoe UI"/>
               </a:rPr>
-              <a:t>Parte: 7 — Ética, Fairness y Privacidad · Fuente: Barocas, Hardt, Narayanan — Fairness and Machine Learning cap. 3 + Hardt, Price, Srebro (NeurIPS 2016) Equality of Opportunity in Supervised Learning.  Duración estimada: 75 min.</a:t>
+              <a:t>Parte: 7 — Ética, Fairness y Privacidad · Fuente: Barocas, Hardt, Narayanan — Fairness and Machine Learning cap. 3 + Hardt, Price, Srebro (NeurIPS 2016) Equality of Opportunity in Supervised Learning.  Duración estimada: 75 min. · Nivel: Intermedio-Avanzado</a:t>
             </a:r>
           </a:p>
         </p:txBody>
